--- a/_multi_pass_test.pptx
+++ b/_multi_pass_test.pptx
@@ -3162,6 +3162,7 @@
                 <a:solidFill>
                   <a:srgbClr val="1A1A1A"/>
                 </a:solidFill>
+                <a:latin typeface="Paperlogy 8 ExtraBold"/>
               </a:rPr>
               <a:t>슬라이드 1 · 표지</a:t>
             </a:r>
@@ -3196,6 +3197,7 @@
                 <a:solidFill>
                   <a:srgbClr val="444444"/>
                 </a:solidFill>
+                <a:latin typeface="Paperlogy 4 Regular"/>
               </a:rPr>
               <a:t>본문 내용 빽빽하게 채움</a:t>
             </a:r>
@@ -3273,6 +3275,7 @@
                 <a:solidFill>
                   <a:srgbClr val="1A1A1A"/>
                 </a:solidFill>
+                <a:latin typeface="Paperlogy 8 ExtraBold"/>
               </a:rPr>
               <a:t>슬라이드 1 · 표지</a:t>
             </a:r>
@@ -3307,6 +3310,7 @@
                 <a:solidFill>
                   <a:srgbClr val="444444"/>
                 </a:solidFill>
+                <a:latin typeface="Paperlogy 4 Regular"/>
               </a:rPr>
               <a:t>본문 내용 빽빽하게 채움</a:t>
             </a:r>
@@ -3384,6 +3388,7 @@
                 <a:solidFill>
                   <a:srgbClr val="1A1A1A"/>
                 </a:solidFill>
+                <a:latin typeface="Paperlogy 8 ExtraBold"/>
               </a:rPr>
               <a:t>슬라이드 1 · 표지</a:t>
             </a:r>
@@ -3418,6 +3423,7 @@
                 <a:solidFill>
                   <a:srgbClr val="444444"/>
                 </a:solidFill>
+                <a:latin typeface="Paperlogy 4 Regular"/>
               </a:rPr>
               <a:t>본문 내용 빽빽하게 채움</a:t>
             </a:r>
@@ -3495,6 +3501,7 @@
                 <a:solidFill>
                   <a:srgbClr val="1A1A1A"/>
                 </a:solidFill>
+                <a:latin typeface="Paperlogy 8 ExtraBold"/>
               </a:rPr>
               <a:t>슬라이드 1 · 표지</a:t>
             </a:r>
@@ -3529,6 +3536,7 @@
                 <a:solidFill>
                   <a:srgbClr val="444444"/>
                 </a:solidFill>
+                <a:latin typeface="Paperlogy 4 Regular"/>
               </a:rPr>
               <a:t>본문 내용 빽빽하게 채움</a:t>
             </a:r>
@@ -3606,6 +3614,7 @@
                 <a:solidFill>
                   <a:srgbClr val="1A1A1A"/>
                 </a:solidFill>
+                <a:latin typeface="Paperlogy 8 ExtraBold"/>
               </a:rPr>
               <a:t>슬라이드 1 · 표지</a:t>
             </a:r>
@@ -3640,6 +3649,7 @@
                 <a:solidFill>
                   <a:srgbClr val="444444"/>
                 </a:solidFill>
+                <a:latin typeface="Paperlogy 4 Regular"/>
               </a:rPr>
               <a:t>본문 내용 빽빽하게 채움</a:t>
             </a:r>
@@ -3735,6 +3745,7 @@
                 <a:solidFill>
                   <a:srgbClr val="1A1A1A"/>
                 </a:solidFill>
+                <a:latin typeface="Paperlogy 8 ExtraBold"/>
               </a:rPr>
               <a:t>슬라이드 2 · 목차</a:t>
             </a:r>
@@ -3769,6 +3780,7 @@
                 <a:solidFill>
                   <a:srgbClr val="444444"/>
                 </a:solidFill>
+                <a:latin typeface="Paperlogy 4 Regular"/>
               </a:rPr>
               <a:t>본문 내용 빽빽하게 채움</a:t>
             </a:r>
@@ -3846,6 +3858,7 @@
                 <a:solidFill>
                   <a:srgbClr val="1A1A1A"/>
                 </a:solidFill>
+                <a:latin typeface="Paperlogy 8 ExtraBold"/>
               </a:rPr>
               <a:t>슬라이드 2 · 목차</a:t>
             </a:r>
@@ -3880,6 +3893,7 @@
                 <a:solidFill>
                   <a:srgbClr val="444444"/>
                 </a:solidFill>
+                <a:latin typeface="Paperlogy 4 Regular"/>
               </a:rPr>
               <a:t>본문 내용 빽빽하게 채움</a:t>
             </a:r>
@@ -3957,6 +3971,7 @@
                 <a:solidFill>
                   <a:srgbClr val="1A1A1A"/>
                 </a:solidFill>
+                <a:latin typeface="Paperlogy 8 ExtraBold"/>
               </a:rPr>
               <a:t>슬라이드 2 · 목차</a:t>
             </a:r>
@@ -3991,6 +4006,7 @@
                 <a:solidFill>
                   <a:srgbClr val="444444"/>
                 </a:solidFill>
+                <a:latin typeface="Paperlogy 4 Regular"/>
               </a:rPr>
               <a:t>본문 내용 빽빽하게 채움</a:t>
             </a:r>
@@ -4068,6 +4084,7 @@
                 <a:solidFill>
                   <a:srgbClr val="1A1A1A"/>
                 </a:solidFill>
+                <a:latin typeface="Paperlogy 8 ExtraBold"/>
               </a:rPr>
               <a:t>슬라이드 2 · 목차</a:t>
             </a:r>
@@ -4102,6 +4119,7 @@
                 <a:solidFill>
                   <a:srgbClr val="444444"/>
                 </a:solidFill>
+                <a:latin typeface="Paperlogy 4 Regular"/>
               </a:rPr>
               <a:t>본문 내용 빽빽하게 채움</a:t>
             </a:r>
@@ -4179,6 +4197,7 @@
                 <a:solidFill>
                   <a:srgbClr val="1A1A1A"/>
                 </a:solidFill>
+                <a:latin typeface="Paperlogy 8 ExtraBold"/>
               </a:rPr>
               <a:t>슬라이드 2 · 목차</a:t>
             </a:r>
@@ -4213,6 +4232,7 @@
                 <a:solidFill>
                   <a:srgbClr val="444444"/>
                 </a:solidFill>
+                <a:latin typeface="Paperlogy 4 Regular"/>
               </a:rPr>
               <a:t>본문 내용 빽빽하게 채움</a:t>
             </a:r>
@@ -4308,6 +4328,7 @@
                 <a:solidFill>
                   <a:srgbClr val="1A1A1A"/>
                 </a:solidFill>
+                <a:latin typeface="Paperlogy 8 ExtraBold"/>
               </a:rPr>
               <a:t>슬라이드 3 · Ⅰ.1 추진배경</a:t>
             </a:r>
@@ -4342,6 +4363,7 @@
                 <a:solidFill>
                   <a:srgbClr val="444444"/>
                 </a:solidFill>
+                <a:latin typeface="Paperlogy 4 Regular"/>
               </a:rPr>
               <a:t>본문 내용 빽빽하게 채움</a:t>
             </a:r>
@@ -4419,6 +4441,7 @@
                 <a:solidFill>
                   <a:srgbClr val="1A1A1A"/>
                 </a:solidFill>
+                <a:latin typeface="Paperlogy 8 ExtraBold"/>
               </a:rPr>
               <a:t>슬라이드 3 · Ⅰ.1 추진배경</a:t>
             </a:r>
@@ -4453,6 +4476,7 @@
                 <a:solidFill>
                   <a:srgbClr val="444444"/>
                 </a:solidFill>
+                <a:latin typeface="Paperlogy 4 Regular"/>
               </a:rPr>
               <a:t>본문 내용 빽빽하게 채움</a:t>
             </a:r>
@@ -4530,6 +4554,7 @@
                 <a:solidFill>
                   <a:srgbClr val="1A1A1A"/>
                 </a:solidFill>
+                <a:latin typeface="Paperlogy 8 ExtraBold"/>
               </a:rPr>
               <a:t>슬라이드 3 · Ⅰ.1 추진배경</a:t>
             </a:r>
@@ -4564,6 +4589,7 @@
                 <a:solidFill>
                   <a:srgbClr val="444444"/>
                 </a:solidFill>
+                <a:latin typeface="Paperlogy 4 Regular"/>
               </a:rPr>
               <a:t>본문 내용 빽빽하게 채움</a:t>
             </a:r>
@@ -4641,6 +4667,7 @@
                 <a:solidFill>
                   <a:srgbClr val="1A1A1A"/>
                 </a:solidFill>
+                <a:latin typeface="Paperlogy 8 ExtraBold"/>
               </a:rPr>
               <a:t>슬라이드 3 · Ⅰ.1 추진배경</a:t>
             </a:r>
@@ -4675,6 +4702,7 @@
                 <a:solidFill>
                   <a:srgbClr val="444444"/>
                 </a:solidFill>
+                <a:latin typeface="Paperlogy 4 Regular"/>
               </a:rPr>
               <a:t>본문 내용 빽빽하게 채움</a:t>
             </a:r>
@@ -4752,6 +4780,7 @@
                 <a:solidFill>
                   <a:srgbClr val="1A1A1A"/>
                 </a:solidFill>
+                <a:latin typeface="Paperlogy 8 ExtraBold"/>
               </a:rPr>
               <a:t>슬라이드 3 · Ⅰ.1 추진배경</a:t>
             </a:r>
@@ -4786,6 +4815,7 @@
                 <a:solidFill>
                   <a:srgbClr val="444444"/>
                 </a:solidFill>
+                <a:latin typeface="Paperlogy 4 Regular"/>
               </a:rPr>
               <a:t>본문 내용 빽빽하게 채움</a:t>
             </a:r>
@@ -4881,6 +4911,7 @@
                 <a:solidFill>
                   <a:srgbClr val="1A1A1A"/>
                 </a:solidFill>
+                <a:latin typeface="Paperlogy 8 ExtraBold"/>
               </a:rPr>
               <a:t>슬라이드 4 · 마무리</a:t>
             </a:r>
@@ -4915,6 +4946,7 @@
                 <a:solidFill>
                   <a:srgbClr val="444444"/>
                 </a:solidFill>
+                <a:latin typeface="Paperlogy 4 Regular"/>
               </a:rPr>
               <a:t>본문 내용 빽빽하게 채움</a:t>
             </a:r>
@@ -4992,6 +5024,7 @@
                 <a:solidFill>
                   <a:srgbClr val="1A1A1A"/>
                 </a:solidFill>
+                <a:latin typeface="Paperlogy 8 ExtraBold"/>
               </a:rPr>
               <a:t>슬라이드 4 · 마무리</a:t>
             </a:r>
@@ -5026,6 +5059,7 @@
                 <a:solidFill>
                   <a:srgbClr val="444444"/>
                 </a:solidFill>
+                <a:latin typeface="Paperlogy 4 Regular"/>
               </a:rPr>
               <a:t>본문 내용 빽빽하게 채움</a:t>
             </a:r>
@@ -5103,6 +5137,7 @@
                 <a:solidFill>
                   <a:srgbClr val="1A1A1A"/>
                 </a:solidFill>
+                <a:latin typeface="Paperlogy 8 ExtraBold"/>
               </a:rPr>
               <a:t>슬라이드 4 · 마무리</a:t>
             </a:r>
@@ -5137,6 +5172,7 @@
                 <a:solidFill>
                   <a:srgbClr val="444444"/>
                 </a:solidFill>
+                <a:latin typeface="Paperlogy 4 Regular"/>
               </a:rPr>
               <a:t>본문 내용 빽빽하게 채움</a:t>
             </a:r>
@@ -5214,6 +5250,7 @@
                 <a:solidFill>
                   <a:srgbClr val="1A1A1A"/>
                 </a:solidFill>
+                <a:latin typeface="Paperlogy 8 ExtraBold"/>
               </a:rPr>
               <a:t>슬라이드 4 · 마무리</a:t>
             </a:r>
@@ -5248,6 +5285,7 @@
                 <a:solidFill>
                   <a:srgbClr val="444444"/>
                 </a:solidFill>
+                <a:latin typeface="Paperlogy 4 Regular"/>
               </a:rPr>
               <a:t>본문 내용 빽빽하게 채움</a:t>
             </a:r>
@@ -5325,6 +5363,7 @@
                 <a:solidFill>
                   <a:srgbClr val="1A1A1A"/>
                 </a:solidFill>
+                <a:latin typeface="Paperlogy 8 ExtraBold"/>
               </a:rPr>
               <a:t>슬라이드 4 · 마무리</a:t>
             </a:r>
@@ -5359,6 +5398,7 @@
                 <a:solidFill>
                   <a:srgbClr val="444444"/>
                 </a:solidFill>
+                <a:latin typeface="Paperlogy 4 Regular"/>
               </a:rPr>
               <a:t>본문 내용 빽빽하게 채움</a:t>
             </a:r>
